--- a/PowerPoint Files/Logos.pptx
+++ b/PowerPoint Files/Logos.pptx
@@ -105,6 +105,11 @@
       </a:defRPr>
     </a:lvl9pPr>
   </p:defaultTextStyle>
+  <p:extLst>
+    <p:ext uri="{EFAFB233-063F-42B5-8137-9DF3F51BA10A}">
+      <p15:sldGuideLst xmlns:p15="http://schemas.microsoft.com/office/powerpoint/2012/main"/>
+    </p:ext>
+  </p:extLst>
 </p:presentation>
 </file>
 
@@ -255,7 +260,7 @@
           <a:p>
             <a:fld id="{3CC60670-CA5F-4790-ACB4-77024DBE5D09}" type="datetimeFigureOut">
               <a:rPr lang="en-US" smtClean="0"/>
-              <a:t>7/2/2025</a:t>
+              <a:t>7/3/2025</a:t>
             </a:fld>
             <a:endParaRPr lang="en-US"/>
           </a:p>
@@ -453,7 +458,7 @@
           <a:p>
             <a:fld id="{3CC60670-CA5F-4790-ACB4-77024DBE5D09}" type="datetimeFigureOut">
               <a:rPr lang="en-US" smtClean="0"/>
-              <a:t>7/2/2025</a:t>
+              <a:t>7/3/2025</a:t>
             </a:fld>
             <a:endParaRPr lang="en-US"/>
           </a:p>
@@ -661,7 +666,7 @@
           <a:p>
             <a:fld id="{3CC60670-CA5F-4790-ACB4-77024DBE5D09}" type="datetimeFigureOut">
               <a:rPr lang="en-US" smtClean="0"/>
-              <a:t>7/2/2025</a:t>
+              <a:t>7/3/2025</a:t>
             </a:fld>
             <a:endParaRPr lang="en-US"/>
           </a:p>
@@ -859,7 +864,7 @@
           <a:p>
             <a:fld id="{3CC60670-CA5F-4790-ACB4-77024DBE5D09}" type="datetimeFigureOut">
               <a:rPr lang="en-US" smtClean="0"/>
-              <a:t>7/2/2025</a:t>
+              <a:t>7/3/2025</a:t>
             </a:fld>
             <a:endParaRPr lang="en-US"/>
           </a:p>
@@ -1134,7 +1139,7 @@
           <a:p>
             <a:fld id="{3CC60670-CA5F-4790-ACB4-77024DBE5D09}" type="datetimeFigureOut">
               <a:rPr lang="en-US" smtClean="0"/>
-              <a:t>7/2/2025</a:t>
+              <a:t>7/3/2025</a:t>
             </a:fld>
             <a:endParaRPr lang="en-US"/>
           </a:p>
@@ -1399,7 +1404,7 @@
           <a:p>
             <a:fld id="{3CC60670-CA5F-4790-ACB4-77024DBE5D09}" type="datetimeFigureOut">
               <a:rPr lang="en-US" smtClean="0"/>
-              <a:t>7/2/2025</a:t>
+              <a:t>7/3/2025</a:t>
             </a:fld>
             <a:endParaRPr lang="en-US"/>
           </a:p>
@@ -1811,7 +1816,7 @@
           <a:p>
             <a:fld id="{3CC60670-CA5F-4790-ACB4-77024DBE5D09}" type="datetimeFigureOut">
               <a:rPr lang="en-US" smtClean="0"/>
-              <a:t>7/2/2025</a:t>
+              <a:t>7/3/2025</a:t>
             </a:fld>
             <a:endParaRPr lang="en-US"/>
           </a:p>
@@ -1952,7 +1957,7 @@
           <a:p>
             <a:fld id="{3CC60670-CA5F-4790-ACB4-77024DBE5D09}" type="datetimeFigureOut">
               <a:rPr lang="en-US" smtClean="0"/>
-              <a:t>7/2/2025</a:t>
+              <a:t>7/3/2025</a:t>
             </a:fld>
             <a:endParaRPr lang="en-US"/>
           </a:p>
@@ -2065,7 +2070,7 @@
           <a:p>
             <a:fld id="{3CC60670-CA5F-4790-ACB4-77024DBE5D09}" type="datetimeFigureOut">
               <a:rPr lang="en-US" smtClean="0"/>
-              <a:t>7/2/2025</a:t>
+              <a:t>7/3/2025</a:t>
             </a:fld>
             <a:endParaRPr lang="en-US"/>
           </a:p>
@@ -2376,7 +2381,7 @@
           <a:p>
             <a:fld id="{3CC60670-CA5F-4790-ACB4-77024DBE5D09}" type="datetimeFigureOut">
               <a:rPr lang="en-US" smtClean="0"/>
-              <a:t>7/2/2025</a:t>
+              <a:t>7/3/2025</a:t>
             </a:fld>
             <a:endParaRPr lang="en-US"/>
           </a:p>
@@ -2664,7 +2669,7 @@
           <a:p>
             <a:fld id="{3CC60670-CA5F-4790-ACB4-77024DBE5D09}" type="datetimeFigureOut">
               <a:rPr lang="en-US" smtClean="0"/>
-              <a:t>7/2/2025</a:t>
+              <a:t>7/3/2025</a:t>
             </a:fld>
             <a:endParaRPr lang="en-US"/>
           </a:p>
@@ -2905,7 +2910,7 @@
           <a:p>
             <a:fld id="{3CC60670-CA5F-4790-ACB4-77024DBE5D09}" type="datetimeFigureOut">
               <a:rPr lang="en-US" smtClean="0"/>
-              <a:t>7/2/2025</a:t>
+              <a:t>7/3/2025</a:t>
             </a:fld>
             <a:endParaRPr lang="en-US"/>
           </a:p>
@@ -3633,6 +3638,42 @@
           </a:p>
         </p:txBody>
       </p:sp>
+      <p:pic>
+        <p:nvPicPr>
+          <p:cNvPr id="3" name="Graphic 2" descr="Single gear with solid fill">
+            <a:extLst>
+              <a:ext uri="{FF2B5EF4-FFF2-40B4-BE49-F238E27FC236}">
+                <a16:creationId xmlns:a16="http://schemas.microsoft.com/office/drawing/2014/main" id="{D2515E4F-50DA-6596-D14D-C0E55E9F8859}"/>
+              </a:ext>
+            </a:extLst>
+          </p:cNvPr>
+          <p:cNvPicPr>
+            <a:picLocks noChangeAspect="1"/>
+          </p:cNvPicPr>
+          <p:nvPr/>
+        </p:nvPicPr>
+        <p:blipFill>
+          <a:blip r:embed="rId6">
+            <a:extLst>
+              <a:ext uri="{96DAC541-7B7A-43D3-8B79-37D633B846F1}">
+                <asvg:svgBlip xmlns:asvg="http://schemas.microsoft.com/office/drawing/2016/SVG/main" r:embed="rId7"/>
+              </a:ext>
+            </a:extLst>
+          </a:blip>
+          <a:stretch>
+            <a:fillRect/>
+          </a:stretch>
+        </p:blipFill>
+        <p:spPr>
+          <a:xfrm>
+            <a:off x="6393412" y="2468961"/>
+            <a:ext cx="3773243" cy="3773243"/>
+          </a:xfrm>
+          <a:prstGeom prst="rect">
+            <a:avLst/>
+          </a:prstGeom>
+        </p:spPr>
+      </p:pic>
     </p:spTree>
     <p:extLst>
       <p:ext uri="{BB962C8B-B14F-4D97-AF65-F5344CB8AC3E}">

--- a/PowerPoint Files/Logos.pptx
+++ b/PowerPoint Files/Logos.pptx
@@ -260,7 +260,7 @@
           <a:p>
             <a:fld id="{3CC60670-CA5F-4790-ACB4-77024DBE5D09}" type="datetimeFigureOut">
               <a:rPr lang="en-US" smtClean="0"/>
-              <a:t>7/3/2025</a:t>
+              <a:t>7/10/2025</a:t>
             </a:fld>
             <a:endParaRPr lang="en-US"/>
           </a:p>
@@ -458,7 +458,7 @@
           <a:p>
             <a:fld id="{3CC60670-CA5F-4790-ACB4-77024DBE5D09}" type="datetimeFigureOut">
               <a:rPr lang="en-US" smtClean="0"/>
-              <a:t>7/3/2025</a:t>
+              <a:t>7/10/2025</a:t>
             </a:fld>
             <a:endParaRPr lang="en-US"/>
           </a:p>
@@ -666,7 +666,7 @@
           <a:p>
             <a:fld id="{3CC60670-CA5F-4790-ACB4-77024DBE5D09}" type="datetimeFigureOut">
               <a:rPr lang="en-US" smtClean="0"/>
-              <a:t>7/3/2025</a:t>
+              <a:t>7/10/2025</a:t>
             </a:fld>
             <a:endParaRPr lang="en-US"/>
           </a:p>
@@ -864,7 +864,7 @@
           <a:p>
             <a:fld id="{3CC60670-CA5F-4790-ACB4-77024DBE5D09}" type="datetimeFigureOut">
               <a:rPr lang="en-US" smtClean="0"/>
-              <a:t>7/3/2025</a:t>
+              <a:t>7/10/2025</a:t>
             </a:fld>
             <a:endParaRPr lang="en-US"/>
           </a:p>
@@ -1139,7 +1139,7 @@
           <a:p>
             <a:fld id="{3CC60670-CA5F-4790-ACB4-77024DBE5D09}" type="datetimeFigureOut">
               <a:rPr lang="en-US" smtClean="0"/>
-              <a:t>7/3/2025</a:t>
+              <a:t>7/10/2025</a:t>
             </a:fld>
             <a:endParaRPr lang="en-US"/>
           </a:p>
@@ -1404,7 +1404,7 @@
           <a:p>
             <a:fld id="{3CC60670-CA5F-4790-ACB4-77024DBE5D09}" type="datetimeFigureOut">
               <a:rPr lang="en-US" smtClean="0"/>
-              <a:t>7/3/2025</a:t>
+              <a:t>7/10/2025</a:t>
             </a:fld>
             <a:endParaRPr lang="en-US"/>
           </a:p>
@@ -1816,7 +1816,7 @@
           <a:p>
             <a:fld id="{3CC60670-CA5F-4790-ACB4-77024DBE5D09}" type="datetimeFigureOut">
               <a:rPr lang="en-US" smtClean="0"/>
-              <a:t>7/3/2025</a:t>
+              <a:t>7/10/2025</a:t>
             </a:fld>
             <a:endParaRPr lang="en-US"/>
           </a:p>
@@ -1957,7 +1957,7 @@
           <a:p>
             <a:fld id="{3CC60670-CA5F-4790-ACB4-77024DBE5D09}" type="datetimeFigureOut">
               <a:rPr lang="en-US" smtClean="0"/>
-              <a:t>7/3/2025</a:t>
+              <a:t>7/10/2025</a:t>
             </a:fld>
             <a:endParaRPr lang="en-US"/>
           </a:p>
@@ -2070,7 +2070,7 @@
           <a:p>
             <a:fld id="{3CC60670-CA5F-4790-ACB4-77024DBE5D09}" type="datetimeFigureOut">
               <a:rPr lang="en-US" smtClean="0"/>
-              <a:t>7/3/2025</a:t>
+              <a:t>7/10/2025</a:t>
             </a:fld>
             <a:endParaRPr lang="en-US"/>
           </a:p>
@@ -2381,7 +2381,7 @@
           <a:p>
             <a:fld id="{3CC60670-CA5F-4790-ACB4-77024DBE5D09}" type="datetimeFigureOut">
               <a:rPr lang="en-US" smtClean="0"/>
-              <a:t>7/3/2025</a:t>
+              <a:t>7/10/2025</a:t>
             </a:fld>
             <a:endParaRPr lang="en-US"/>
           </a:p>
@@ -2669,7 +2669,7 @@
           <a:p>
             <a:fld id="{3CC60670-CA5F-4790-ACB4-77024DBE5D09}" type="datetimeFigureOut">
               <a:rPr lang="en-US" smtClean="0"/>
-              <a:t>7/3/2025</a:t>
+              <a:t>7/10/2025</a:t>
             </a:fld>
             <a:endParaRPr lang="en-US"/>
           </a:p>
@@ -2910,7 +2910,7 @@
           <a:p>
             <a:fld id="{3CC60670-CA5F-4790-ACB4-77024DBE5D09}" type="datetimeFigureOut">
               <a:rPr lang="en-US" smtClean="0"/>
-              <a:t>7/3/2025</a:t>
+              <a:t>7/10/2025</a:t>
             </a:fld>
             <a:endParaRPr lang="en-US"/>
           </a:p>
